--- a/cursos/recursos/el-mapa-de-los-finales/08-caballo-contra-peon.pptx
+++ b/cursos/recursos/el-mapa-de-los-finales/08-caballo-contra-peon.pptx
@@ -6112,7 +6112,7 @@
                 </a:solidFill>
                 <a:latin typeface="Calibri"/>
               </a:rPr>
-              <a:t>Con el peón de torre en séptima, jugá contra el motor cinco veces desde posiciones distintas del rey.</a:t>
+              <a:t>Con el peón de torre en séptima, juega contra el motor cinco veces desde posiciones distintas del rey.</a:t>
             </a:r>
           </a:p>
           <a:p>
@@ -6183,7 +6183,7 @@
                 </a:solidFill>
                 <a:latin typeface="Calibri"/>
               </a:rPr>
-              <a:t>•  Recorré cada línea principal hasta entender el porqué de cada jugada.</a:t>
+              <a:t>•  Recorre cada línea principal hasta entender el porqué de cada jugada.</a:t>
             </a:r>
           </a:p>
           <a:p>
@@ -6199,7 +6199,7 @@
                 </a:solidFill>
                 <a:latin typeface="Calibri"/>
               </a:rPr>
-              <a:t>•  Practicá primero las posiciones clave, después las demás.</a:t>
+              <a:t>•  Practica primero las posiciones clave, después las demás.</a:t>
             </a:r>
           </a:p>
           <a:p>
@@ -6215,7 +6215,7 @@
                 </a:solidFill>
                 <a:latin typeface="Calibri"/>
               </a:rPr>
-              <a:t>•  Anotá las reglas de cada final con tus palabras.</a:t>
+              <a:t>•  Anota las reglas de cada final con tus palabras.</a:t>
             </a:r>
           </a:p>
         </p:txBody>
